--- a/Presentations/2026Mar20_sKK_AR_Analysis_v2.pptx
+++ b/Presentations/2026Mar20_sKK_AR_Analysis_v2.pptx
@@ -5,7 +5,7 @@
     <p:sldMasterId id="2147483648" r:id="rId1"/>
   </p:sldMasterIdLst>
   <p:notesMasterIdLst>
-    <p:notesMasterId r:id="rId22"/>
+    <p:notesMasterId r:id="rId23"/>
   </p:notesMasterIdLst>
   <p:sldIdLst>
     <p:sldId id="256" r:id="rId2"/>
@@ -14,20 +14,21 @@
     <p:sldId id="259" r:id="rId5"/>
     <p:sldId id="264" r:id="rId6"/>
     <p:sldId id="260" r:id="rId7"/>
-    <p:sldId id="267" r:id="rId8"/>
-    <p:sldId id="261" r:id="rId9"/>
-    <p:sldId id="262" r:id="rId10"/>
-    <p:sldId id="263" r:id="rId11"/>
-    <p:sldId id="268" r:id="rId12"/>
-    <p:sldId id="269" r:id="rId13"/>
-    <p:sldId id="270" r:id="rId14"/>
-    <p:sldId id="271" r:id="rId15"/>
-    <p:sldId id="272" r:id="rId16"/>
-    <p:sldId id="273" r:id="rId17"/>
-    <p:sldId id="274" r:id="rId18"/>
-    <p:sldId id="275" r:id="rId19"/>
-    <p:sldId id="265" r:id="rId20"/>
-    <p:sldId id="266" r:id="rId21"/>
+    <p:sldId id="276" r:id="rId8"/>
+    <p:sldId id="267" r:id="rId9"/>
+    <p:sldId id="261" r:id="rId10"/>
+    <p:sldId id="262" r:id="rId11"/>
+    <p:sldId id="263" r:id="rId12"/>
+    <p:sldId id="268" r:id="rId13"/>
+    <p:sldId id="269" r:id="rId14"/>
+    <p:sldId id="270" r:id="rId15"/>
+    <p:sldId id="271" r:id="rId16"/>
+    <p:sldId id="272" r:id="rId17"/>
+    <p:sldId id="273" r:id="rId18"/>
+    <p:sldId id="274" r:id="rId19"/>
+    <p:sldId id="275" r:id="rId20"/>
+    <p:sldId id="265" r:id="rId21"/>
+    <p:sldId id="266" r:id="rId22"/>
   </p:sldIdLst>
   <p:sldSz cx="9144000" cy="5143500" type="screen16x9"/>
   <p:notesSz cx="5143500" cy="9144000"/>
@@ -405,7 +406,7 @@
           <a:p>
             <a:fld id="{F7021451-1387-4CA6-816F-3879F97B5CBC}" type="slidenum">
               <a:rPr lang="en-US"/>
-              <a:t>10</a:t>
+              <a:t>11</a:t>
             </a:fld>
             <a:endParaRPr lang="en-US"/>
           </a:p>
@@ -489,7 +490,7 @@
           <a:p>
             <a:fld id="{F7021451-1387-4CA6-816F-3879F97B5CBC}" type="slidenum">
               <a:rPr lang="en-US"/>
-              <a:t>19</a:t>
+              <a:t>20</a:t>
             </a:fld>
             <a:endParaRPr lang="en-US"/>
           </a:p>
@@ -573,7 +574,7 @@
           <a:p>
             <a:fld id="{F7021451-1387-4CA6-816F-3879F97B5CBC}" type="slidenum">
               <a:rPr lang="en-US"/>
-              <a:t>20</a:t>
+              <a:t>21</a:t>
             </a:fld>
             <a:endParaRPr lang="en-US"/>
           </a:p>
@@ -1101,7 +1102,7 @@
           <a:p>
             <a:fld id="{F7021451-1387-4CA6-816F-3879F97B5CBC}" type="slidenum">
               <a:rPr lang="en-US"/>
-              <a:t>7</a:t>
+              <a:t>8</a:t>
             </a:fld>
             <a:endParaRPr lang="en-US"/>
           </a:p>
@@ -1185,7 +1186,7 @@
           <a:p>
             <a:fld id="{F7021451-1387-4CA6-816F-3879F97B5CBC}" type="slidenum">
               <a:rPr lang="en-US"/>
-              <a:t>8</a:t>
+              <a:t>9</a:t>
             </a:fld>
             <a:endParaRPr lang="en-US"/>
           </a:p>
@@ -1269,7 +1270,7 @@
           <a:p>
             <a:fld id="{F7021451-1387-4CA6-816F-3879F97B5CBC}" type="slidenum">
               <a:rPr lang="en-US"/>
-              <a:t>9</a:t>
+              <a:t>10</a:t>
             </a:fld>
             <a:endParaRPr lang="en-US"/>
           </a:p>
@@ -1762,6 +1763,100 @@
 
 <file path=ppt/slides/slide10.xml><?xml version="1.0" encoding="utf-8"?>
 <p:sld xmlns:a="http://schemas.openxmlformats.org/drawingml/2006/main" xmlns:r="http://schemas.openxmlformats.org/officeDocument/2006/relationships" xmlns:p="http://schemas.openxmlformats.org/presentationml/2006/main">
+  <p:cSld name="Slide 7">
+    <p:spTree>
+      <p:nvGrpSpPr>
+        <p:cNvPr id="1" name=""/>
+        <p:cNvGrpSpPr/>
+        <p:nvPr/>
+      </p:nvGrpSpPr>
+      <p:grpSpPr>
+        <a:xfrm>
+          <a:off x="0" y="0"/>
+          <a:ext cx="0" cy="0"/>
+          <a:chOff x="0" y="0"/>
+          <a:chExt cx="0" cy="0"/>
+        </a:xfrm>
+      </p:grpSpPr>
+      <p:sp>
+        <p:nvSpPr>
+          <p:cNvPr id="2" name="Text 0"/>
+          <p:cNvSpPr/>
+          <p:nvPr/>
+        </p:nvSpPr>
+        <p:spPr>
+          <a:xfrm>
+            <a:off x="274320" y="137160"/>
+            <a:ext cx="8595360" cy="731520"/>
+          </a:xfrm>
+          <a:prstGeom prst="rect">
+            <a:avLst/>
+          </a:prstGeom>
+          <a:noFill/>
+          <a:ln/>
+        </p:spPr>
+        <p:txBody>
+          <a:bodyPr wrap="square" lIns="0" tIns="0" rIns="0" bIns="0" rtlCol="0" anchor="t"/>
+          <a:lstStyle/>
+          <a:p>
+            <a:pPr marL="0" indent="0">
+              <a:buNone/>
+            </a:pPr>
+            <a:r>
+              <a:rPr lang="en-US" sz="2400" b="1" dirty="0">
+                <a:solidFill>
+                  <a:srgbClr val="000000"/>
+                </a:solidFill>
+                <a:latin typeface="Arial" pitchFamily="34" charset="0"/>
+                <a:ea typeface="Arial" pitchFamily="34" charset="-122"/>
+                <a:cs typeface="Arial" pitchFamily="34" charset="-120"/>
+              </a:rPr>
+              <a:t>Smooth Gating Removes Unphysical "Lossy Air" Region</a:t>
+            </a:r>
+            <a:endParaRPr lang="en-US" sz="2400" dirty="0"/>
+          </a:p>
+        </p:txBody>
+      </p:sp>
+      <p:pic>
+        <p:nvPicPr>
+          <p:cNvPr id="5" name="Picture 4" descr="A group of graphs showing different colors&#10;&#10;AI-generated content may be incorrect.">
+            <a:extLst>
+              <a:ext uri="{FF2B5EF4-FFF2-40B4-BE49-F238E27FC236}">
+                <a16:creationId xmlns:a16="http://schemas.microsoft.com/office/drawing/2014/main" id="{2171E0F8-B821-FA53-1CE7-9451EA5842A3}"/>
+              </a:ext>
+            </a:extLst>
+          </p:cNvPr>
+          <p:cNvPicPr>
+            <a:picLocks noChangeAspect="1"/>
+          </p:cNvPicPr>
+          <p:nvPr/>
+        </p:nvPicPr>
+        <p:blipFill>
+          <a:blip r:embed="rId3"/>
+          <a:stretch>
+            <a:fillRect/>
+          </a:stretch>
+        </p:blipFill>
+        <p:spPr>
+          <a:xfrm>
+            <a:off x="265355" y="600634"/>
+            <a:ext cx="8755117" cy="4498041"/>
+          </a:xfrm>
+          <a:prstGeom prst="rect">
+            <a:avLst/>
+          </a:prstGeom>
+        </p:spPr>
+      </p:pic>
+    </p:spTree>
+  </p:cSld>
+  <p:clrMapOvr>
+    <a:masterClrMapping/>
+  </p:clrMapOvr>
+</p:sld>
+</file>
+
+<file path=ppt/slides/slide11.xml><?xml version="1.0" encoding="utf-8"?>
+<p:sld xmlns:a="http://schemas.openxmlformats.org/drawingml/2006/main" xmlns:r="http://schemas.openxmlformats.org/officeDocument/2006/relationships" xmlns:p="http://schemas.openxmlformats.org/presentationml/2006/main">
   <p:cSld name="Slide 8">
     <p:spTree>
       <p:nvGrpSpPr>
@@ -1904,7 +1999,7 @@
 </p:sld>
 </file>
 
-<file path=ppt/slides/slide11.xml><?xml version="1.0" encoding="utf-8"?>
+<file path=ppt/slides/slide12.xml><?xml version="1.0" encoding="utf-8"?>
 <p:sld xmlns:a="http://schemas.openxmlformats.org/drawingml/2006/main" xmlns:r="http://schemas.openxmlformats.org/officeDocument/2006/relationships" xmlns:p="http://schemas.openxmlformats.org/presentationml/2006/main">
   <p:cSld>
     <p:spTree>
@@ -2253,7 +2348,7 @@
 </p:sld>
 </file>
 
-<file path=ppt/slides/slide12.xml><?xml version="1.0" encoding="utf-8"?>
+<file path=ppt/slides/slide13.xml><?xml version="1.0" encoding="utf-8"?>
 <p:sld xmlns:a="http://schemas.openxmlformats.org/drawingml/2006/main" xmlns:r="http://schemas.openxmlformats.org/officeDocument/2006/relationships" xmlns:p="http://schemas.openxmlformats.org/presentationml/2006/main">
   <p:cSld>
     <p:spTree>
@@ -2606,7 +2701,7 @@
 </p:sld>
 </file>
 
-<file path=ppt/slides/slide13.xml><?xml version="1.0" encoding="utf-8"?>
+<file path=ppt/slides/slide14.xml><?xml version="1.0" encoding="utf-8"?>
 <p:sld xmlns:a="http://schemas.openxmlformats.org/drawingml/2006/main" xmlns:r="http://schemas.openxmlformats.org/officeDocument/2006/relationships" xmlns:p="http://schemas.openxmlformats.org/presentationml/2006/main">
   <p:cSld>
     <p:spTree>
@@ -2980,7 +3075,7 @@
 </p:sld>
 </file>
 
-<file path=ppt/slides/slide14.xml><?xml version="1.0" encoding="utf-8"?>
+<file path=ppt/slides/slide15.xml><?xml version="1.0" encoding="utf-8"?>
 <p:sld xmlns:a="http://schemas.openxmlformats.org/drawingml/2006/main" xmlns:r="http://schemas.openxmlformats.org/officeDocument/2006/relationships" xmlns:p="http://schemas.openxmlformats.org/presentationml/2006/main">
   <p:cSld>
     <p:spTree>
@@ -3333,7 +3428,7 @@
 </p:sld>
 </file>
 
-<file path=ppt/slides/slide15.xml><?xml version="1.0" encoding="utf-8"?>
+<file path=ppt/slides/slide16.xml><?xml version="1.0" encoding="utf-8"?>
 <p:sld xmlns:a="http://schemas.openxmlformats.org/drawingml/2006/main" xmlns:r="http://schemas.openxmlformats.org/officeDocument/2006/relationships" xmlns:p="http://schemas.openxmlformats.org/presentationml/2006/main">
   <p:cSld>
     <p:spTree>
@@ -3686,7 +3781,7 @@
 </p:sld>
 </file>
 
-<file path=ppt/slides/slide16.xml><?xml version="1.0" encoding="utf-8"?>
+<file path=ppt/slides/slide17.xml><?xml version="1.0" encoding="utf-8"?>
 <p:sld xmlns:a="http://schemas.openxmlformats.org/drawingml/2006/main" xmlns:r="http://schemas.openxmlformats.org/officeDocument/2006/relationships" xmlns:p="http://schemas.openxmlformats.org/presentationml/2006/main">
   <p:cSld>
     <p:spTree>
@@ -4039,7 +4134,7 @@
 </p:sld>
 </file>
 
-<file path=ppt/slides/slide17.xml><?xml version="1.0" encoding="utf-8"?>
+<file path=ppt/slides/slide18.xml><?xml version="1.0" encoding="utf-8"?>
 <p:sld xmlns:a="http://schemas.openxmlformats.org/drawingml/2006/main" xmlns:r="http://schemas.openxmlformats.org/officeDocument/2006/relationships" xmlns:p="http://schemas.openxmlformats.org/presentationml/2006/main">
   <p:cSld>
     <p:spTree>
@@ -4255,7 +4350,7 @@
 </p:sld>
 </file>
 
-<file path=ppt/slides/slide18.xml><?xml version="1.0" encoding="utf-8"?>
+<file path=ppt/slides/slide19.xml><?xml version="1.0" encoding="utf-8"?>
 <p:sld xmlns:a="http://schemas.openxmlformats.org/drawingml/2006/main" xmlns:r="http://schemas.openxmlformats.org/officeDocument/2006/relationships" xmlns:p="http://schemas.openxmlformats.org/presentationml/2006/main" show="0">
   <p:cSld>
     <p:spTree>
@@ -4345,228 +4440,6 @@
 </p:sld>
 </file>
 
-<file path=ppt/slides/slide19.xml><?xml version="1.0" encoding="utf-8"?>
-<p:sld xmlns:a="http://schemas.openxmlformats.org/drawingml/2006/main" xmlns:r="http://schemas.openxmlformats.org/officeDocument/2006/relationships" xmlns:p="http://schemas.openxmlformats.org/presentationml/2006/main">
-  <p:cSld name="Slide 10">
-    <p:spTree>
-      <p:nvGrpSpPr>
-        <p:cNvPr id="1" name=""/>
-        <p:cNvGrpSpPr/>
-        <p:nvPr/>
-      </p:nvGrpSpPr>
-      <p:grpSpPr>
-        <a:xfrm>
-          <a:off x="0" y="0"/>
-          <a:ext cx="0" cy="0"/>
-          <a:chOff x="0" y="0"/>
-          <a:chExt cx="0" cy="0"/>
-        </a:xfrm>
-      </p:grpSpPr>
-      <p:sp>
-        <p:nvSpPr>
-          <p:cNvPr id="2" name="Text 0"/>
-          <p:cNvSpPr/>
-          <p:nvPr/>
-        </p:nvSpPr>
-        <p:spPr>
-          <a:xfrm>
-            <a:off x="274320" y="137160"/>
-            <a:ext cx="8595360" cy="731520"/>
-          </a:xfrm>
-          <a:prstGeom prst="rect">
-            <a:avLst/>
-          </a:prstGeom>
-          <a:noFill/>
-          <a:ln/>
-        </p:spPr>
-        <p:txBody>
-          <a:bodyPr wrap="square" lIns="0" tIns="0" rIns="0" bIns="0" rtlCol="0" anchor="t"/>
-          <a:lstStyle/>
-          <a:p>
-            <a:pPr marL="0" indent="0">
-              <a:buNone/>
-            </a:pPr>
-            <a:r>
-              <a:rPr lang="en-US" sz="2400" b="1" dirty="0">
-                <a:solidFill>
-                  <a:srgbClr val="000000"/>
-                </a:solidFill>
-                <a:latin typeface="Arial" pitchFamily="34" charset="0"/>
-                <a:ea typeface="Arial" pitchFamily="34" charset="-122"/>
-                <a:cs typeface="Arial" pitchFamily="34" charset="-120"/>
-              </a:rPr>
-              <a:t>Design Space: GRIN vs sKK Across Coating Thickness</a:t>
-            </a:r>
-            <a:endParaRPr lang="en-US" sz="2400" dirty="0"/>
-          </a:p>
-        </p:txBody>
-      </p:sp>
-      <p:sp>
-        <p:nvSpPr>
-          <p:cNvPr id="4" name="Text 1"/>
-          <p:cNvSpPr/>
-          <p:nvPr/>
-        </p:nvSpPr>
-        <p:spPr>
-          <a:xfrm>
-            <a:off x="274320" y="4437456"/>
-            <a:ext cx="8595360" cy="640080"/>
-          </a:xfrm>
-          <a:prstGeom prst="rect">
-            <a:avLst/>
-          </a:prstGeom>
-          <a:noFill/>
-          <a:ln/>
-        </p:spPr>
-        <p:txBody>
-          <a:bodyPr wrap="square" rtlCol="0" anchor="ctr"/>
-          <a:lstStyle/>
-          <a:p>
-            <a:pPr marL="0" indent="0">
-              <a:buNone/>
-            </a:pPr>
-            <a:r>
-              <a:rPr lang="en-US" sz="1200" b="1" dirty="0">
-                <a:solidFill>
-                  <a:srgbClr val="333333"/>
-                </a:solidFill>
-                <a:latin typeface="Arial" pitchFamily="34" charset="0"/>
-                <a:ea typeface="Arial" pitchFamily="34" charset="-122"/>
-                <a:cs typeface="Arial" pitchFamily="34" charset="-120"/>
-              </a:rPr>
-              <a:t>Three regimes: </a:t>
-            </a:r>
-            <a:r>
-              <a:rPr lang="en-US" sz="1200" dirty="0">
-                <a:solidFill>
-                  <a:srgbClr val="333333"/>
-                </a:solidFill>
-                <a:latin typeface="Arial" pitchFamily="34" charset="0"/>
-                <a:ea typeface="Arial" pitchFamily="34" charset="-122"/>
-                <a:cs typeface="Arial" pitchFamily="34" charset="-120"/>
-              </a:rPr>
-              <a:t>Sub-λ coatings (&lt;1.5 μm) where GRIN is ineffective and sKK provides the only path to low R — but at the cost of absorption and broken analyticity. Thick coatings (&gt;6 μm) where GRIN alone achieves low R without absorption. Crossover region (1.5–6 μm) is where the design tradeoff is most nuanced.</a:t>
-            </a:r>
-            <a:endParaRPr lang="en-US" sz="1200" dirty="0"/>
-          </a:p>
-        </p:txBody>
-      </p:sp>
-      <p:sp>
-        <p:nvSpPr>
-          <p:cNvPr id="6" name="Text 1">
-            <a:extLst>
-              <a:ext uri="{FF2B5EF4-FFF2-40B4-BE49-F238E27FC236}">
-                <a16:creationId xmlns:a16="http://schemas.microsoft.com/office/drawing/2014/main" id="{348F827E-0736-8F76-887C-72B31B4298C6}"/>
-              </a:ext>
-            </a:extLst>
-          </p:cNvPr>
-          <p:cNvSpPr/>
-          <p:nvPr/>
-        </p:nvSpPr>
-        <p:spPr>
-          <a:xfrm>
-            <a:off x="815789" y="2057400"/>
-            <a:ext cx="2716305" cy="640080"/>
-          </a:xfrm>
-          <a:prstGeom prst="rect">
-            <a:avLst/>
-          </a:prstGeom>
-          <a:noFill/>
-          <a:ln/>
-        </p:spPr>
-        <p:txBody>
-          <a:bodyPr wrap="square" rtlCol="0" anchor="ctr"/>
-          <a:lstStyle/>
-          <a:p>
-            <a:pPr marL="0" indent="0" algn="ctr">
-              <a:buNone/>
-            </a:pPr>
-            <a:r>
-              <a:rPr lang="en-US" sz="1400" dirty="0">
-                <a:solidFill>
-                  <a:srgbClr val="333333"/>
-                </a:solidFill>
-                <a:latin typeface="Arial" pitchFamily="34" charset="0"/>
-                <a:ea typeface="Arial" pitchFamily="34" charset="-122"/>
-                <a:cs typeface="Arial" pitchFamily="34" charset="-120"/>
-              </a:rPr>
-              <a:t>averaged </a:t>
-            </a:r>
-            <a:r>
-              <a:rPr lang="en-US" sz="1400" dirty="0" err="1">
-                <a:solidFill>
-                  <a:srgbClr val="333333"/>
-                </a:solidFill>
-                <a:latin typeface="Arial" pitchFamily="34" charset="0"/>
-                <a:ea typeface="Arial" pitchFamily="34" charset="-122"/>
-                <a:cs typeface="Arial" pitchFamily="34" charset="-120"/>
-              </a:rPr>
-              <a:t>R</a:t>
-            </a:r>
-            <a:r>
-              <a:rPr lang="en-US" sz="1400" baseline="-25000" dirty="0" err="1">
-                <a:solidFill>
-                  <a:srgbClr val="333333"/>
-                </a:solidFill>
-                <a:latin typeface="Arial" pitchFamily="34" charset="0"/>
-                <a:ea typeface="Arial" pitchFamily="34" charset="-122"/>
-                <a:cs typeface="Arial" pitchFamily="34" charset="-120"/>
-              </a:rPr>
-              <a:t>back</a:t>
-            </a:r>
-            <a:r>
-              <a:rPr lang="en-US" sz="1400" dirty="0">
-                <a:solidFill>
-                  <a:srgbClr val="333333"/>
-                </a:solidFill>
-                <a:latin typeface="Arial" pitchFamily="34" charset="0"/>
-                <a:ea typeface="Arial" pitchFamily="34" charset="-122"/>
-                <a:cs typeface="Arial" pitchFamily="34" charset="-120"/>
-              </a:rPr>
-              <a:t> between 2-5um (s-pol, 80deg):</a:t>
-            </a:r>
-            <a:endParaRPr lang="en-US" sz="1400" dirty="0"/>
-          </a:p>
-        </p:txBody>
-      </p:sp>
-      <p:pic>
-        <p:nvPicPr>
-          <p:cNvPr id="5" name="Picture 4" descr="A graph of reflection and coating thickness&#10;&#10;AI-generated content may be incorrect.">
-            <a:extLst>
-              <a:ext uri="{FF2B5EF4-FFF2-40B4-BE49-F238E27FC236}">
-                <a16:creationId xmlns:a16="http://schemas.microsoft.com/office/drawing/2014/main" id="{68326292-EFC5-9786-9BC1-60CF5D73BBF8}"/>
-              </a:ext>
-            </a:extLst>
-          </p:cNvPr>
-          <p:cNvPicPr>
-            <a:picLocks noChangeAspect="1"/>
-          </p:cNvPicPr>
-          <p:nvPr/>
-        </p:nvPicPr>
-        <p:blipFill>
-          <a:blip r:embed="rId3"/>
-          <a:stretch>
-            <a:fillRect/>
-          </a:stretch>
-        </p:blipFill>
-        <p:spPr>
-          <a:xfrm>
-            <a:off x="3532094" y="680421"/>
-            <a:ext cx="5320553" cy="3622504"/>
-          </a:xfrm>
-          <a:prstGeom prst="rect">
-            <a:avLst/>
-          </a:prstGeom>
-        </p:spPr>
-      </p:pic>
-    </p:spTree>
-  </p:cSld>
-  <p:clrMapOvr>
-    <a:masterClrMapping/>
-  </p:clrMapOvr>
-</p:sld>
-</file>
-
 <file path=ppt/slides/slide2.xml><?xml version="1.0" encoding="utf-8"?>
 <p:sld xmlns:a="http://schemas.openxmlformats.org/drawingml/2006/main" xmlns:r="http://schemas.openxmlformats.org/officeDocument/2006/relationships" xmlns:p="http://schemas.openxmlformats.org/presentationml/2006/main">
   <p:cSld name="Slide 2">
@@ -4761,6 +4634,228 @@
 </file>
 
 <file path=ppt/slides/slide20.xml><?xml version="1.0" encoding="utf-8"?>
+<p:sld xmlns:a="http://schemas.openxmlformats.org/drawingml/2006/main" xmlns:r="http://schemas.openxmlformats.org/officeDocument/2006/relationships" xmlns:p="http://schemas.openxmlformats.org/presentationml/2006/main">
+  <p:cSld name="Slide 10">
+    <p:spTree>
+      <p:nvGrpSpPr>
+        <p:cNvPr id="1" name=""/>
+        <p:cNvGrpSpPr/>
+        <p:nvPr/>
+      </p:nvGrpSpPr>
+      <p:grpSpPr>
+        <a:xfrm>
+          <a:off x="0" y="0"/>
+          <a:ext cx="0" cy="0"/>
+          <a:chOff x="0" y="0"/>
+          <a:chExt cx="0" cy="0"/>
+        </a:xfrm>
+      </p:grpSpPr>
+      <p:sp>
+        <p:nvSpPr>
+          <p:cNvPr id="2" name="Text 0"/>
+          <p:cNvSpPr/>
+          <p:nvPr/>
+        </p:nvSpPr>
+        <p:spPr>
+          <a:xfrm>
+            <a:off x="274320" y="137160"/>
+            <a:ext cx="8595360" cy="731520"/>
+          </a:xfrm>
+          <a:prstGeom prst="rect">
+            <a:avLst/>
+          </a:prstGeom>
+          <a:noFill/>
+          <a:ln/>
+        </p:spPr>
+        <p:txBody>
+          <a:bodyPr wrap="square" lIns="0" tIns="0" rIns="0" bIns="0" rtlCol="0" anchor="t"/>
+          <a:lstStyle/>
+          <a:p>
+            <a:pPr marL="0" indent="0">
+              <a:buNone/>
+            </a:pPr>
+            <a:r>
+              <a:rPr lang="en-US" sz="2400" b="1" dirty="0">
+                <a:solidFill>
+                  <a:srgbClr val="000000"/>
+                </a:solidFill>
+                <a:latin typeface="Arial" pitchFamily="34" charset="0"/>
+                <a:ea typeface="Arial" pitchFamily="34" charset="-122"/>
+                <a:cs typeface="Arial" pitchFamily="34" charset="-120"/>
+              </a:rPr>
+              <a:t>Design Space: GRIN vs sKK Across Coating Thickness</a:t>
+            </a:r>
+            <a:endParaRPr lang="en-US" sz="2400" dirty="0"/>
+          </a:p>
+        </p:txBody>
+      </p:sp>
+      <p:sp>
+        <p:nvSpPr>
+          <p:cNvPr id="4" name="Text 1"/>
+          <p:cNvSpPr/>
+          <p:nvPr/>
+        </p:nvSpPr>
+        <p:spPr>
+          <a:xfrm>
+            <a:off x="274320" y="4437456"/>
+            <a:ext cx="8595360" cy="640080"/>
+          </a:xfrm>
+          <a:prstGeom prst="rect">
+            <a:avLst/>
+          </a:prstGeom>
+          <a:noFill/>
+          <a:ln/>
+        </p:spPr>
+        <p:txBody>
+          <a:bodyPr wrap="square" rtlCol="0" anchor="ctr"/>
+          <a:lstStyle/>
+          <a:p>
+            <a:pPr marL="0" indent="0">
+              <a:buNone/>
+            </a:pPr>
+            <a:r>
+              <a:rPr lang="en-US" sz="1200" b="1" dirty="0">
+                <a:solidFill>
+                  <a:srgbClr val="333333"/>
+                </a:solidFill>
+                <a:latin typeface="Arial" pitchFamily="34" charset="0"/>
+                <a:ea typeface="Arial" pitchFamily="34" charset="-122"/>
+                <a:cs typeface="Arial" pitchFamily="34" charset="-120"/>
+              </a:rPr>
+              <a:t>Three regimes: </a:t>
+            </a:r>
+            <a:r>
+              <a:rPr lang="en-US" sz="1200" dirty="0">
+                <a:solidFill>
+                  <a:srgbClr val="333333"/>
+                </a:solidFill>
+                <a:latin typeface="Arial" pitchFamily="34" charset="0"/>
+                <a:ea typeface="Arial" pitchFamily="34" charset="-122"/>
+                <a:cs typeface="Arial" pitchFamily="34" charset="-120"/>
+              </a:rPr>
+              <a:t>Sub-λ coatings (&lt;1.5 μm) where GRIN is ineffective and sKK provides the only path to low R — but at the cost of absorption and broken analyticity. Thick coatings (&gt;6 μm) where GRIN alone achieves low R without absorption. Crossover region (1.5–6 μm) is where the design tradeoff is most nuanced.</a:t>
+            </a:r>
+            <a:endParaRPr lang="en-US" sz="1200" dirty="0"/>
+          </a:p>
+        </p:txBody>
+      </p:sp>
+      <p:sp>
+        <p:nvSpPr>
+          <p:cNvPr id="6" name="Text 1">
+            <a:extLst>
+              <a:ext uri="{FF2B5EF4-FFF2-40B4-BE49-F238E27FC236}">
+                <a16:creationId xmlns:a16="http://schemas.microsoft.com/office/drawing/2014/main" id="{348F827E-0736-8F76-887C-72B31B4298C6}"/>
+              </a:ext>
+            </a:extLst>
+          </p:cNvPr>
+          <p:cNvSpPr/>
+          <p:nvPr/>
+        </p:nvSpPr>
+        <p:spPr>
+          <a:xfrm>
+            <a:off x="815789" y="2057400"/>
+            <a:ext cx="2716305" cy="640080"/>
+          </a:xfrm>
+          <a:prstGeom prst="rect">
+            <a:avLst/>
+          </a:prstGeom>
+          <a:noFill/>
+          <a:ln/>
+        </p:spPr>
+        <p:txBody>
+          <a:bodyPr wrap="square" rtlCol="0" anchor="ctr"/>
+          <a:lstStyle/>
+          <a:p>
+            <a:pPr marL="0" indent="0" algn="ctr">
+              <a:buNone/>
+            </a:pPr>
+            <a:r>
+              <a:rPr lang="en-US" sz="1400" dirty="0">
+                <a:solidFill>
+                  <a:srgbClr val="333333"/>
+                </a:solidFill>
+                <a:latin typeface="Arial" pitchFamily="34" charset="0"/>
+                <a:ea typeface="Arial" pitchFamily="34" charset="-122"/>
+                <a:cs typeface="Arial" pitchFamily="34" charset="-120"/>
+              </a:rPr>
+              <a:t>averaged </a:t>
+            </a:r>
+            <a:r>
+              <a:rPr lang="en-US" sz="1400" dirty="0" err="1">
+                <a:solidFill>
+                  <a:srgbClr val="333333"/>
+                </a:solidFill>
+                <a:latin typeface="Arial" pitchFamily="34" charset="0"/>
+                <a:ea typeface="Arial" pitchFamily="34" charset="-122"/>
+                <a:cs typeface="Arial" pitchFamily="34" charset="-120"/>
+              </a:rPr>
+              <a:t>R</a:t>
+            </a:r>
+            <a:r>
+              <a:rPr lang="en-US" sz="1400" baseline="-25000" dirty="0" err="1">
+                <a:solidFill>
+                  <a:srgbClr val="333333"/>
+                </a:solidFill>
+                <a:latin typeface="Arial" pitchFamily="34" charset="0"/>
+                <a:ea typeface="Arial" pitchFamily="34" charset="-122"/>
+                <a:cs typeface="Arial" pitchFamily="34" charset="-120"/>
+              </a:rPr>
+              <a:t>back</a:t>
+            </a:r>
+            <a:r>
+              <a:rPr lang="en-US" sz="1400" dirty="0">
+                <a:solidFill>
+                  <a:srgbClr val="333333"/>
+                </a:solidFill>
+                <a:latin typeface="Arial" pitchFamily="34" charset="0"/>
+                <a:ea typeface="Arial" pitchFamily="34" charset="-122"/>
+                <a:cs typeface="Arial" pitchFamily="34" charset="-120"/>
+              </a:rPr>
+              <a:t> between 2-5um (s-pol, 80deg):</a:t>
+            </a:r>
+            <a:endParaRPr lang="en-US" sz="1400" dirty="0"/>
+          </a:p>
+        </p:txBody>
+      </p:sp>
+      <p:pic>
+        <p:nvPicPr>
+          <p:cNvPr id="5" name="Picture 4" descr="A graph of reflection and coating thickness&#10;&#10;AI-generated content may be incorrect.">
+            <a:extLst>
+              <a:ext uri="{FF2B5EF4-FFF2-40B4-BE49-F238E27FC236}">
+                <a16:creationId xmlns:a16="http://schemas.microsoft.com/office/drawing/2014/main" id="{68326292-EFC5-9786-9BC1-60CF5D73BBF8}"/>
+              </a:ext>
+            </a:extLst>
+          </p:cNvPr>
+          <p:cNvPicPr>
+            <a:picLocks noChangeAspect="1"/>
+          </p:cNvPicPr>
+          <p:nvPr/>
+        </p:nvPicPr>
+        <p:blipFill>
+          <a:blip r:embed="rId3"/>
+          <a:stretch>
+            <a:fillRect/>
+          </a:stretch>
+        </p:blipFill>
+        <p:spPr>
+          <a:xfrm>
+            <a:off x="3532094" y="680421"/>
+            <a:ext cx="5320553" cy="3622504"/>
+          </a:xfrm>
+          <a:prstGeom prst="rect">
+            <a:avLst/>
+          </a:prstGeom>
+        </p:spPr>
+      </p:pic>
+    </p:spTree>
+  </p:cSld>
+  <p:clrMapOvr>
+    <a:masterClrMapping/>
+  </p:clrMapOvr>
+</p:sld>
+</file>
+
+<file path=ppt/slides/slide21.xml><?xml version="1.0" encoding="utf-8"?>
 <p:sld xmlns:a="http://schemas.openxmlformats.org/drawingml/2006/main" xmlns:r="http://schemas.openxmlformats.org/officeDocument/2006/relationships" xmlns:p="http://schemas.openxmlformats.org/presentationml/2006/main">
   <p:cSld name="Slide 11">
     <p:spTree>
@@ -5958,6 +6053,385 @@
 </file>
 
 <file path=ppt/slides/slide7.xml><?xml version="1.0" encoding="utf-8"?>
+<p:sld xmlns:a="http://schemas.openxmlformats.org/drawingml/2006/main" xmlns:r="http://schemas.openxmlformats.org/officeDocument/2006/relationships" xmlns:p="http://schemas.openxmlformats.org/presentationml/2006/main">
+  <p:cSld>
+    <p:spTree>
+      <p:nvGrpSpPr>
+        <p:cNvPr id="1" name=""/>
+        <p:cNvGrpSpPr/>
+        <p:nvPr/>
+      </p:nvGrpSpPr>
+      <p:grpSpPr>
+        <a:xfrm>
+          <a:off x="0" y="0"/>
+          <a:ext cx="0" cy="0"/>
+          <a:chOff x="0" y="0"/>
+          <a:chExt cx="0" cy="0"/>
+        </a:xfrm>
+      </p:grpSpPr>
+      <p:pic>
+        <p:nvPicPr>
+          <p:cNvPr id="3" name="Picture 2">
+            <a:extLst>
+              <a:ext uri="{FF2B5EF4-FFF2-40B4-BE49-F238E27FC236}">
+                <a16:creationId xmlns:a16="http://schemas.microsoft.com/office/drawing/2014/main" id="{1B5EB28F-4CD3-6C8F-C56F-7808B3738A07}"/>
+              </a:ext>
+            </a:extLst>
+          </p:cNvPr>
+          <p:cNvPicPr>
+            <a:picLocks noChangeAspect="1"/>
+          </p:cNvPicPr>
+          <p:nvPr/>
+        </p:nvPicPr>
+        <p:blipFill>
+          <a:blip r:embed="rId2"/>
+          <a:srcRect r="50000"/>
+          <a:stretch>
+            <a:fillRect/>
+          </a:stretch>
+        </p:blipFill>
+        <p:spPr>
+          <a:xfrm>
+            <a:off x="5714862" y="209158"/>
+            <a:ext cx="3008381" cy="2266053"/>
+          </a:xfrm>
+          <a:prstGeom prst="rect">
+            <a:avLst/>
+          </a:prstGeom>
+        </p:spPr>
+      </p:pic>
+      <p:pic>
+        <p:nvPicPr>
+          <p:cNvPr id="4" name="Picture 3">
+            <a:extLst>
+              <a:ext uri="{FF2B5EF4-FFF2-40B4-BE49-F238E27FC236}">
+                <a16:creationId xmlns:a16="http://schemas.microsoft.com/office/drawing/2014/main" id="{FAD7749C-319B-C92B-71F7-B075E39F5645}"/>
+              </a:ext>
+            </a:extLst>
+          </p:cNvPr>
+          <p:cNvPicPr>
+            <a:picLocks noChangeAspect="1"/>
+          </p:cNvPicPr>
+          <p:nvPr/>
+        </p:nvPicPr>
+        <p:blipFill>
+          <a:blip r:embed="rId3"/>
+          <a:stretch>
+            <a:fillRect/>
+          </a:stretch>
+        </p:blipFill>
+        <p:spPr>
+          <a:xfrm>
+            <a:off x="2363097" y="347332"/>
+            <a:ext cx="3008380" cy="2127879"/>
+          </a:xfrm>
+          <a:prstGeom prst="rect">
+            <a:avLst/>
+          </a:prstGeom>
+        </p:spPr>
+      </p:pic>
+      <p:sp>
+        <p:nvSpPr>
+          <p:cNvPr id="5" name="TextBox 4">
+            <a:extLst>
+              <a:ext uri="{FF2B5EF4-FFF2-40B4-BE49-F238E27FC236}">
+                <a16:creationId xmlns:a16="http://schemas.microsoft.com/office/drawing/2014/main" id="{EA50BAD7-A060-5F77-A4E7-51E3BF2C86F2}"/>
+              </a:ext>
+            </a:extLst>
+          </p:cNvPr>
+          <p:cNvSpPr txBox="1"/>
+          <p:nvPr/>
+        </p:nvSpPr>
+        <p:spPr>
+          <a:xfrm>
+            <a:off x="981674" y="2668290"/>
+            <a:ext cx="7180652" cy="738664"/>
+          </a:xfrm>
+          <a:prstGeom prst="rect">
+            <a:avLst/>
+          </a:prstGeom>
+          <a:noFill/>
+        </p:spPr>
+        <p:txBody>
+          <a:bodyPr wrap="square" rtlCol="0">
+            <a:spAutoFit/>
+          </a:bodyPr>
+          <a:lstStyle/>
+          <a:p>
+            <a:r>
+              <a:rPr lang="en-US" sz="1400" dirty="0"/>
+              <a:t>spatial frequency k is the </a:t>
+            </a:r>
+            <a:r>
+              <a:rPr lang="en-US" sz="1400" dirty="0" err="1"/>
+              <a:t>fourier</a:t>
+            </a:r>
+            <a:r>
+              <a:rPr lang="en-US" sz="1400" dirty="0"/>
+              <a:t> conjugate of position x. low k means slowly varying features</a:t>
+            </a:r>
+          </a:p>
+          <a:p>
+            <a:endParaRPr lang="en-US" sz="1400"/>
+          </a:p>
+          <a:p>
+            <a:endParaRPr lang="en-US" sz="1400" dirty="0"/>
+          </a:p>
+        </p:txBody>
+      </p:sp>
+      <mc:AlternateContent xmlns:mc="http://schemas.openxmlformats.org/markup-compatibility/2006">
+        <mc:Choice xmlns:a14="http://schemas.microsoft.com/office/drawing/2010/main" Requires="a14">
+          <p:sp>
+            <p:nvSpPr>
+              <p:cNvPr id="6" name="Rectangle 5">
+                <a:extLst>
+                  <a:ext uri="{FF2B5EF4-FFF2-40B4-BE49-F238E27FC236}">
+                    <a16:creationId xmlns:a16="http://schemas.microsoft.com/office/drawing/2014/main" id="{DB580476-7C93-A926-0CCF-2FC082E56C9A}"/>
+                  </a:ext>
+                </a:extLst>
+              </p:cNvPr>
+              <p:cNvSpPr/>
+              <p:nvPr/>
+            </p:nvSpPr>
+            <p:spPr>
+              <a:xfrm>
+                <a:off x="458429" y="1075380"/>
+                <a:ext cx="1732975" cy="533608"/>
+              </a:xfrm>
+              <a:prstGeom prst="rect">
+                <a:avLst/>
+              </a:prstGeom>
+            </p:spPr>
+            <p:txBody>
+              <a:bodyPr wrap="none">
+                <a:spAutoFit/>
+              </a:bodyPr>
+              <a:lstStyle/>
+              <a:p>
+                <a:pPr/>
+                <a14:m>
+                  <m:oMathPara xmlns:m="http://schemas.openxmlformats.org/officeDocument/2006/math">
+                    <m:oMathParaPr>
+                      <m:jc m:val="centerGroup"/>
+                    </m:oMathParaPr>
+                    <m:oMath xmlns:m="http://schemas.openxmlformats.org/officeDocument/2006/math">
+                      <m:r>
+                        <a:rPr lang="en-US" sz="1400" b="0" i="1" smtClean="0">
+                          <a:latin typeface="Cambria Math" panose="02040503050406030204" pitchFamily="18" charset="0"/>
+                        </a:rPr>
+                        <m:t>𝜀</m:t>
+                      </m:r>
+                      <m:d>
+                        <m:dPr>
+                          <m:ctrlPr>
+                            <a:rPr lang="en-US" sz="1400" b="0" i="1" smtClean="0">
+                              <a:latin typeface="Cambria Math" panose="02040503050406030204" pitchFamily="18" charset="0"/>
+                            </a:rPr>
+                          </m:ctrlPr>
+                        </m:dPr>
+                        <m:e>
+                          <m:r>
+                            <a:rPr lang="en-US" sz="1400" b="0" i="1" smtClean="0">
+                              <a:latin typeface="Cambria Math" panose="02040503050406030204" pitchFamily="18" charset="0"/>
+                            </a:rPr>
+                            <m:t>𝑥</m:t>
+                          </m:r>
+                        </m:e>
+                      </m:d>
+                      <m:r>
+                        <a:rPr lang="en-US" sz="1400" b="0" i="1" smtClean="0">
+                          <a:latin typeface="Cambria Math" panose="02040503050406030204" pitchFamily="18" charset="0"/>
+                        </a:rPr>
+                        <m:t>=</m:t>
+                      </m:r>
+                      <m:sSub>
+                        <m:sSubPr>
+                          <m:ctrlPr>
+                            <a:rPr lang="en-US" sz="1400" b="0" i="1" smtClean="0">
+                              <a:latin typeface="Cambria Math" panose="02040503050406030204" pitchFamily="18" charset="0"/>
+                            </a:rPr>
+                          </m:ctrlPr>
+                        </m:sSubPr>
+                        <m:e>
+                          <m:r>
+                            <a:rPr lang="en-US" sz="1400" b="0" i="1" smtClean="0">
+                              <a:latin typeface="Cambria Math" panose="02040503050406030204" pitchFamily="18" charset="0"/>
+                            </a:rPr>
+                            <m:t>𝜀</m:t>
+                          </m:r>
+                        </m:e>
+                        <m:sub>
+                          <m:r>
+                            <m:rPr>
+                              <m:sty m:val="p"/>
+                            </m:rPr>
+                            <a:rPr lang="en-US" sz="1400" b="0" i="0" smtClean="0">
+                              <a:latin typeface="Cambria Math" panose="02040503050406030204" pitchFamily="18" charset="0"/>
+                            </a:rPr>
+                            <m:t>b</m:t>
+                          </m:r>
+                        </m:sub>
+                      </m:sSub>
+                      <m:r>
+                        <a:rPr lang="en-US" sz="1400" b="0" i="1" smtClean="0">
+                          <a:latin typeface="Cambria Math" panose="02040503050406030204" pitchFamily="18" charset="0"/>
+                        </a:rPr>
+                        <m:t>−</m:t>
+                      </m:r>
+                      <m:f>
+                        <m:fPr>
+                          <m:ctrlPr>
+                            <a:rPr lang="en-US" sz="1400" b="0" i="1" smtClean="0">
+                              <a:latin typeface="Cambria Math" panose="02040503050406030204" pitchFamily="18" charset="0"/>
+                            </a:rPr>
+                          </m:ctrlPr>
+                        </m:fPr>
+                        <m:num>
+                          <m:r>
+                            <a:rPr lang="en-US" sz="1400" b="0" i="1" smtClean="0">
+                              <a:latin typeface="Cambria Math" panose="02040503050406030204" pitchFamily="18" charset="0"/>
+                            </a:rPr>
+                            <m:t>𝐴</m:t>
+                          </m:r>
+                          <m:sSub>
+                            <m:sSubPr>
+                              <m:ctrlPr>
+                                <a:rPr lang="en-US" sz="1400" b="0" i="1" smtClean="0">
+                                  <a:latin typeface="Cambria Math" panose="02040503050406030204" pitchFamily="18" charset="0"/>
+                                </a:rPr>
+                              </m:ctrlPr>
+                            </m:sSubPr>
+                            <m:e>
+                              <m:r>
+                                <a:rPr lang="en-US" sz="1400" b="0" i="1" smtClean="0">
+                                  <a:latin typeface="Cambria Math" panose="02040503050406030204" pitchFamily="18" charset="0"/>
+                                </a:rPr>
+                                <m:t>𝑥</m:t>
+                              </m:r>
+                            </m:e>
+                            <m:sub>
+                              <m:r>
+                                <a:rPr lang="en-US" sz="1400" b="0" i="1" smtClean="0">
+                                  <a:latin typeface="Cambria Math" panose="02040503050406030204" pitchFamily="18" charset="0"/>
+                                </a:rPr>
+                                <m:t>0</m:t>
+                              </m:r>
+                            </m:sub>
+                          </m:sSub>
+                        </m:num>
+                        <m:den>
+                          <m:r>
+                            <a:rPr lang="en-US" sz="1400" b="0" i="1" smtClean="0">
+                              <a:latin typeface="Cambria Math" panose="02040503050406030204" pitchFamily="18" charset="0"/>
+                            </a:rPr>
+                            <m:t>𝑥</m:t>
+                          </m:r>
+                          <m:r>
+                            <a:rPr lang="en-US" sz="1400" b="0" i="1" smtClean="0">
+                              <a:latin typeface="Cambria Math" panose="02040503050406030204" pitchFamily="18" charset="0"/>
+                            </a:rPr>
+                            <m:t>+</m:t>
+                          </m:r>
+                          <m:r>
+                            <a:rPr lang="en-US" sz="1400" b="0" i="1" smtClean="0">
+                              <a:latin typeface="Cambria Math" panose="02040503050406030204" pitchFamily="18" charset="0"/>
+                            </a:rPr>
+                            <m:t>𝑖</m:t>
+                          </m:r>
+                          <m:sSub>
+                            <m:sSubPr>
+                              <m:ctrlPr>
+                                <a:rPr lang="en-US" sz="1400" b="0" i="1" smtClean="0">
+                                  <a:latin typeface="Cambria Math" panose="02040503050406030204" pitchFamily="18" charset="0"/>
+                                </a:rPr>
+                              </m:ctrlPr>
+                            </m:sSubPr>
+                            <m:e>
+                              <m:r>
+                                <a:rPr lang="en-US" sz="1400" b="0" i="1" smtClean="0">
+                                  <a:latin typeface="Cambria Math" panose="02040503050406030204" pitchFamily="18" charset="0"/>
+                                </a:rPr>
+                                <m:t>𝑥</m:t>
+                              </m:r>
+                            </m:e>
+                            <m:sub>
+                              <m:r>
+                                <a:rPr lang="en-US" sz="1400" b="0" i="1" smtClean="0">
+                                  <a:latin typeface="Cambria Math" panose="02040503050406030204" pitchFamily="18" charset="0"/>
+                                </a:rPr>
+                                <m:t>0</m:t>
+                              </m:r>
+                            </m:sub>
+                          </m:sSub>
+                        </m:den>
+                      </m:f>
+                    </m:oMath>
+                  </m:oMathPara>
+                </a14:m>
+                <a:endParaRPr lang="en-US" sz="1400" dirty="0"/>
+              </a:p>
+            </p:txBody>
+          </p:sp>
+        </mc:Choice>
+        <mc:Fallback>
+          <p:sp>
+            <p:nvSpPr>
+              <p:cNvPr id="6" name="Rectangle 5">
+                <a:extLst>
+                  <a:ext uri="{FF2B5EF4-FFF2-40B4-BE49-F238E27FC236}">
+                    <a16:creationId xmlns:a16="http://schemas.microsoft.com/office/drawing/2014/main" id="{DB580476-7C93-A926-0CCF-2FC082E56C9A}"/>
+                  </a:ext>
+                </a:extLst>
+              </p:cNvPr>
+              <p:cNvSpPr>
+                <a:spLocks noRot="1" noChangeAspect="1" noMove="1" noResize="1" noEditPoints="1" noAdjustHandles="1" noChangeArrowheads="1" noChangeShapeType="1" noTextEdit="1"/>
+              </p:cNvSpPr>
+              <p:nvPr/>
+            </p:nvSpPr>
+            <p:spPr>
+              <a:xfrm>
+                <a:off x="458429" y="1075380"/>
+                <a:ext cx="1732975" cy="533608"/>
+              </a:xfrm>
+              <a:prstGeom prst="rect">
+                <a:avLst/>
+              </a:prstGeom>
+              <a:blipFill>
+                <a:blip r:embed="rId4"/>
+                <a:stretch>
+                  <a:fillRect/>
+                </a:stretch>
+              </a:blipFill>
+            </p:spPr>
+            <p:txBody>
+              <a:bodyPr/>
+              <a:lstStyle/>
+              <a:p>
+                <a:r>
+                  <a:rPr lang="en-US">
+                    <a:noFill/>
+                  </a:rPr>
+                  <a:t> </a:t>
+                </a:r>
+              </a:p>
+            </p:txBody>
+          </p:sp>
+        </mc:Fallback>
+      </mc:AlternateContent>
+    </p:spTree>
+    <p:extLst>
+      <p:ext uri="{BB962C8B-B14F-4D97-AF65-F5344CB8AC3E}">
+        <p14:creationId xmlns:p14="http://schemas.microsoft.com/office/powerpoint/2010/main" val="3073910009"/>
+      </p:ext>
+    </p:extLst>
+  </p:cSld>
+  <p:clrMapOvr>
+    <a:masterClrMapping/>
+  </p:clrMapOvr>
+</p:sld>
+</file>
+
+<file path=ppt/slides/slide8.xml><?xml version="1.0" encoding="utf-8"?>
 <p:sld xmlns:a="http://schemas.openxmlformats.org/drawingml/2006/main" xmlns:r="http://schemas.openxmlformats.org/officeDocument/2006/relationships" xmlns:p="http://schemas.openxmlformats.org/presentationml/2006/main">
   <p:cSld>
     <p:spTree>
@@ -6407,7 +6881,7 @@
 </p:sld>
 </file>
 
-<file path=ppt/slides/slide8.xml><?xml version="1.0" encoding="utf-8"?>
+<file path=ppt/slides/slide9.xml><?xml version="1.0" encoding="utf-8"?>
 <p:sld xmlns:a="http://schemas.openxmlformats.org/drawingml/2006/main" xmlns:r="http://schemas.openxmlformats.org/officeDocument/2006/relationships" xmlns:p="http://schemas.openxmlformats.org/presentationml/2006/main">
   <p:cSld name="Slide 6">
     <p:spTree>
@@ -6752,100 +7226,6 @@
           </a:p>
         </p:txBody>
       </p:sp>
-    </p:spTree>
-  </p:cSld>
-  <p:clrMapOvr>
-    <a:masterClrMapping/>
-  </p:clrMapOvr>
-</p:sld>
-</file>
-
-<file path=ppt/slides/slide9.xml><?xml version="1.0" encoding="utf-8"?>
-<p:sld xmlns:a="http://schemas.openxmlformats.org/drawingml/2006/main" xmlns:r="http://schemas.openxmlformats.org/officeDocument/2006/relationships" xmlns:p="http://schemas.openxmlformats.org/presentationml/2006/main">
-  <p:cSld name="Slide 7">
-    <p:spTree>
-      <p:nvGrpSpPr>
-        <p:cNvPr id="1" name=""/>
-        <p:cNvGrpSpPr/>
-        <p:nvPr/>
-      </p:nvGrpSpPr>
-      <p:grpSpPr>
-        <a:xfrm>
-          <a:off x="0" y="0"/>
-          <a:ext cx="0" cy="0"/>
-          <a:chOff x="0" y="0"/>
-          <a:chExt cx="0" cy="0"/>
-        </a:xfrm>
-      </p:grpSpPr>
-      <p:sp>
-        <p:nvSpPr>
-          <p:cNvPr id="2" name="Text 0"/>
-          <p:cNvSpPr/>
-          <p:nvPr/>
-        </p:nvSpPr>
-        <p:spPr>
-          <a:xfrm>
-            <a:off x="274320" y="137160"/>
-            <a:ext cx="8595360" cy="731520"/>
-          </a:xfrm>
-          <a:prstGeom prst="rect">
-            <a:avLst/>
-          </a:prstGeom>
-          <a:noFill/>
-          <a:ln/>
-        </p:spPr>
-        <p:txBody>
-          <a:bodyPr wrap="square" lIns="0" tIns="0" rIns="0" bIns="0" rtlCol="0" anchor="t"/>
-          <a:lstStyle/>
-          <a:p>
-            <a:pPr marL="0" indent="0">
-              <a:buNone/>
-            </a:pPr>
-            <a:r>
-              <a:rPr lang="en-US" sz="2400" b="1" dirty="0">
-                <a:solidFill>
-                  <a:srgbClr val="000000"/>
-                </a:solidFill>
-                <a:latin typeface="Arial" pitchFamily="34" charset="0"/>
-                <a:ea typeface="Arial" pitchFamily="34" charset="-122"/>
-                <a:cs typeface="Arial" pitchFamily="34" charset="-120"/>
-              </a:rPr>
-              <a:t>Smooth Gating Removes Unphysical "Lossy Air" Region</a:t>
-            </a:r>
-            <a:endParaRPr lang="en-US" sz="2400" dirty="0"/>
-          </a:p>
-        </p:txBody>
-      </p:sp>
-      <p:pic>
-        <p:nvPicPr>
-          <p:cNvPr id="5" name="Picture 4" descr="A group of graphs showing different colors&#10;&#10;AI-generated content may be incorrect.">
-            <a:extLst>
-              <a:ext uri="{FF2B5EF4-FFF2-40B4-BE49-F238E27FC236}">
-                <a16:creationId xmlns:a16="http://schemas.microsoft.com/office/drawing/2014/main" id="{2171E0F8-B821-FA53-1CE7-9451EA5842A3}"/>
-              </a:ext>
-            </a:extLst>
-          </p:cNvPr>
-          <p:cNvPicPr>
-            <a:picLocks noChangeAspect="1"/>
-          </p:cNvPicPr>
-          <p:nvPr/>
-        </p:nvPicPr>
-        <p:blipFill>
-          <a:blip r:embed="rId3"/>
-          <a:stretch>
-            <a:fillRect/>
-          </a:stretch>
-        </p:blipFill>
-        <p:spPr>
-          <a:xfrm>
-            <a:off x="265355" y="600634"/>
-            <a:ext cx="8755117" cy="4498041"/>
-          </a:xfrm>
-          <a:prstGeom prst="rect">
-            <a:avLst/>
-          </a:prstGeom>
-        </p:spPr>
-      </p:pic>
     </p:spTree>
   </p:cSld>
   <p:clrMapOvr>
